--- a/dads-a4-template/dist/stdfont/STD_B5_Portrait_Template.pptx
+++ b/dads-a4-template/dist/stdfont/STD_B5_Portrait_Template.pptx
@@ -4392,7 +4392,7 @@
         <p:spPr>
           <a:xfrm>
             <a:off x="685200" y="1542000"/>
-            <a:ext cx="5181600" cy="576000"/>
+            <a:ext cx="5181600" cy="575760"/>
           </a:xfrm>
           <a:prstGeom prst="rect">
             <a:avLst/>
@@ -4429,7 +4429,7 @@
                 <a:ea typeface="+mn-ea"/>
                 <a:cs typeface="+mn-cs"/>
               </a:rPr>
-              <a:t>書体は和文に BIZ UDPGothic、欧文に Arial を使用します（いずれもPCに標準搭載され、WindowsとMacで書体名が一致します）。サイズはデジタル庁デザインシステムのテキストスタイル（CSS px）を 0.75 倍して pt に換算した値です。</a:t>
+              <a:t>書体は和文 BIZ UDPGothic／欧文 Arial。サイズは CSS px を 0.75 倍して pt に換算した値です。</a:t>
             </a:r>
           </a:p>
         </p:txBody>
@@ -4442,7 +4442,7 @@
         </p:nvSpPr>
         <p:spPr>
           <a:xfrm>
-            <a:off x="685200" y="2092800"/>
+            <a:off x="685200" y="2193960"/>
             <a:ext cx="976650" cy="784080"/>
           </a:xfrm>
           <a:prstGeom prst="rect">
@@ -4493,7 +4493,7 @@
         </p:nvSpPr>
         <p:spPr>
           <a:xfrm>
-            <a:off x="1805850" y="2092800"/>
+            <a:off x="1805850" y="2193960"/>
             <a:ext cx="2581350" cy="784080"/>
           </a:xfrm>
           <a:prstGeom prst="rect">
@@ -4544,7 +4544,7 @@
         </p:nvSpPr>
         <p:spPr>
           <a:xfrm>
-            <a:off x="4459200" y="2092800"/>
+            <a:off x="4459200" y="2193960"/>
             <a:ext cx="1407600" cy="784080"/>
           </a:xfrm>
           <a:prstGeom prst="rect">
@@ -4595,7 +4595,7 @@
         </p:nvSpPr>
         <p:spPr>
           <a:xfrm>
-            <a:off x="685200" y="2895930"/>
+            <a:off x="685200" y="2997090"/>
             <a:ext cx="5181600" cy="5400"/>
           </a:xfrm>
           <a:prstGeom prst="rect">
@@ -4622,7 +4622,7 @@
         </p:nvSpPr>
         <p:spPr>
           <a:xfrm>
-            <a:off x="685200" y="2914980"/>
+            <a:off x="685200" y="3016140"/>
             <a:ext cx="976650" cy="601200"/>
           </a:xfrm>
           <a:prstGeom prst="rect">
@@ -4673,7 +4673,7 @@
         </p:nvSpPr>
         <p:spPr>
           <a:xfrm>
-            <a:off x="1805850" y="2914980"/>
+            <a:off x="1805850" y="3016140"/>
             <a:ext cx="2581350" cy="601200"/>
           </a:xfrm>
           <a:prstGeom prst="rect">
@@ -4724,7 +4724,7 @@
         </p:nvSpPr>
         <p:spPr>
           <a:xfrm>
-            <a:off x="4459200" y="2914980"/>
+            <a:off x="4459200" y="3016140"/>
             <a:ext cx="1407600" cy="601200"/>
           </a:xfrm>
           <a:prstGeom prst="rect">
@@ -4775,7 +4775,7 @@
         </p:nvSpPr>
         <p:spPr>
           <a:xfrm>
-            <a:off x="685200" y="3535230"/>
+            <a:off x="685200" y="3636390"/>
             <a:ext cx="5181600" cy="5400"/>
           </a:xfrm>
           <a:prstGeom prst="rect">
@@ -4802,7 +4802,7 @@
         </p:nvSpPr>
         <p:spPr>
           <a:xfrm>
-            <a:off x="685200" y="3554280"/>
+            <a:off x="685200" y="3655440"/>
             <a:ext cx="976650" cy="486900"/>
           </a:xfrm>
           <a:prstGeom prst="rect">
@@ -4853,7 +4853,7 @@
         </p:nvSpPr>
         <p:spPr>
           <a:xfrm>
-            <a:off x="1805850" y="3554280"/>
+            <a:off x="1805850" y="3655440"/>
             <a:ext cx="2581350" cy="486900"/>
           </a:xfrm>
           <a:prstGeom prst="rect">
@@ -4904,7 +4904,7 @@
         </p:nvSpPr>
         <p:spPr>
           <a:xfrm>
-            <a:off x="4459200" y="3554280"/>
+            <a:off x="4459200" y="3655440"/>
             <a:ext cx="1407600" cy="486900"/>
           </a:xfrm>
           <a:prstGeom prst="rect">
@@ -4955,7 +4955,7 @@
         </p:nvSpPr>
         <p:spPr>
           <a:xfrm>
-            <a:off x="685200" y="4060230"/>
+            <a:off x="685200" y="4161390"/>
             <a:ext cx="5181600" cy="5400"/>
           </a:xfrm>
           <a:prstGeom prst="rect">
@@ -4982,7 +4982,7 @@
         </p:nvSpPr>
         <p:spPr>
           <a:xfrm>
-            <a:off x="685200" y="4079280"/>
+            <a:off x="685200" y="4180440"/>
             <a:ext cx="976650" cy="429750"/>
           </a:xfrm>
           <a:prstGeom prst="rect">
@@ -5033,7 +5033,7 @@
         </p:nvSpPr>
         <p:spPr>
           <a:xfrm>
-            <a:off x="1805850" y="4079280"/>
+            <a:off x="1805850" y="4180440"/>
             <a:ext cx="2581350" cy="429750"/>
           </a:xfrm>
           <a:prstGeom prst="rect">
@@ -5084,7 +5084,7 @@
         </p:nvSpPr>
         <p:spPr>
           <a:xfrm>
-            <a:off x="4459200" y="4079280"/>
+            <a:off x="4459200" y="4180440"/>
             <a:ext cx="1407600" cy="429750"/>
           </a:xfrm>
           <a:prstGeom prst="rect">
@@ -5135,7 +5135,7 @@
         </p:nvSpPr>
         <p:spPr>
           <a:xfrm>
-            <a:off x="685200" y="4528080"/>
+            <a:off x="685200" y="4629240"/>
             <a:ext cx="5181600" cy="5400"/>
           </a:xfrm>
           <a:prstGeom prst="rect">
@@ -5162,7 +5162,7 @@
         </p:nvSpPr>
         <p:spPr>
           <a:xfrm>
-            <a:off x="685200" y="4547130"/>
+            <a:off x="685200" y="4648290"/>
             <a:ext cx="976650" cy="403080"/>
           </a:xfrm>
           <a:prstGeom prst="rect">
@@ -5213,7 +5213,7 @@
         </p:nvSpPr>
         <p:spPr>
           <a:xfrm>
-            <a:off x="1805850" y="4547130"/>
+            <a:off x="1805850" y="4648290"/>
             <a:ext cx="2581350" cy="403080"/>
           </a:xfrm>
           <a:prstGeom prst="rect">
@@ -5264,7 +5264,7 @@
         </p:nvSpPr>
         <p:spPr>
           <a:xfrm>
-            <a:off x="4459200" y="4547130"/>
+            <a:off x="4459200" y="4648290"/>
             <a:ext cx="1407600" cy="403080"/>
           </a:xfrm>
           <a:prstGeom prst="rect">
@@ -5315,7 +5315,7 @@
         </p:nvSpPr>
         <p:spPr>
           <a:xfrm>
-            <a:off x="685200" y="4969260"/>
+            <a:off x="685200" y="5070420"/>
             <a:ext cx="5181600" cy="5400"/>
           </a:xfrm>
           <a:prstGeom prst="rect">
@@ -5342,7 +5342,7 @@
         </p:nvSpPr>
         <p:spPr>
           <a:xfrm>
-            <a:off x="685200" y="4988310"/>
+            <a:off x="685200" y="5089470"/>
             <a:ext cx="976650" cy="403080"/>
           </a:xfrm>
           <a:prstGeom prst="rect">
@@ -5393,7 +5393,7 @@
         </p:nvSpPr>
         <p:spPr>
           <a:xfrm>
-            <a:off x="1805850" y="4988310"/>
+            <a:off x="1805850" y="5089470"/>
             <a:ext cx="2581350" cy="403080"/>
           </a:xfrm>
           <a:prstGeom prst="rect">
@@ -5444,7 +5444,7 @@
         </p:nvSpPr>
         <p:spPr>
           <a:xfrm>
-            <a:off x="4459200" y="4988310"/>
+            <a:off x="4459200" y="5089470"/>
             <a:ext cx="1407600" cy="403080"/>
           </a:xfrm>
           <a:prstGeom prst="rect">
@@ -5495,7 +5495,7 @@
         </p:nvSpPr>
         <p:spPr>
           <a:xfrm>
-            <a:off x="685200" y="5410440"/>
+            <a:off x="685200" y="5511600"/>
             <a:ext cx="5181600" cy="5400"/>
           </a:xfrm>
           <a:prstGeom prst="rect">
@@ -5522,7 +5522,7 @@
         </p:nvSpPr>
         <p:spPr>
           <a:xfrm>
-            <a:off x="685200" y="5429490"/>
+            <a:off x="685200" y="5530650"/>
             <a:ext cx="976650" cy="317355"/>
           </a:xfrm>
           <a:prstGeom prst="rect">
@@ -5573,7 +5573,7 @@
         </p:nvSpPr>
         <p:spPr>
           <a:xfrm>
-            <a:off x="1805850" y="5429490"/>
+            <a:off x="1805850" y="5530650"/>
             <a:ext cx="2581350" cy="317355"/>
           </a:xfrm>
           <a:prstGeom prst="rect">
@@ -5624,7 +5624,7 @@
         </p:nvSpPr>
         <p:spPr>
           <a:xfrm>
-            <a:off x="4459200" y="5429490"/>
+            <a:off x="4459200" y="5530650"/>
             <a:ext cx="1407600" cy="317355"/>
           </a:xfrm>
           <a:prstGeom prst="rect">
@@ -5675,7 +5675,7 @@
         </p:nvSpPr>
         <p:spPr>
           <a:xfrm>
-            <a:off x="685200" y="5765895"/>
+            <a:off x="685200" y="5867055"/>
             <a:ext cx="5181600" cy="5400"/>
           </a:xfrm>
           <a:prstGeom prst="rect">
@@ -5702,7 +5702,7 @@
         </p:nvSpPr>
         <p:spPr>
           <a:xfrm>
-            <a:off x="685200" y="6013545"/>
+            <a:off x="685200" y="6114705"/>
             <a:ext cx="5181600" cy="2520000"/>
           </a:xfrm>
           <a:prstGeom prst="rect">
@@ -5770,37 +5770,7 @@
                 <a:ea typeface="+mn-ea"/>
                 <a:cs typeface="+mn-cs"/>
               </a:rPr>
-              <a:t>行間は比率で固定しています（本文170%／見出し150%／表・注記130%）。PowerPoint上は「固定値（pt）」指定のため、書体を替えても行位置がずれません。</a:t>
-            </a:r>
-          </a:p>
-          <a:p>
-            <a:pPr marL="0" indent="0" algn="l">
-              <a:lnSpc>
-                <a:spcPts val="2040"/>
-              </a:lnSpc>
-              <a:spcBef>
-                <a:spcPts val="600"/>
-              </a:spcBef>
-              <a:buNone/>
-              <a:defRPr sz="1200" b="0" i="0" spc="24" kern="1200" dirty="0">
-                <a:solidFill>
-                  <a:srgbClr val="000000"/>
-                </a:solidFill>
-                <a:latin typeface="+mn-lt"/>
-                <a:ea typeface="+mn-ea"/>
-                <a:cs typeface="+mn-cs"/>
-              </a:defRPr>
-            </a:pPr>
-            <a:r>
-              <a:rPr lang="ja-JP" altLang="en-US" sz="1200" b="0" i="0" spc="24" kern="1200" dirty="0">
-                <a:solidFill>
-                  <a:srgbClr val="000000"/>
-                </a:solidFill>
-                <a:latin typeface="+mn-lt"/>
-                <a:ea typeface="+mn-ea"/>
-                <a:cs typeface="+mn-cs"/>
-              </a:rPr>
-              <a:t>字間はデジタル庁デザインシステムの指定（0％・1％・2％）を pt に換算済みです。</a:t>
+              <a:t>行間・字間はデジタル庁デザインシステムの指定を pt に換算して固定しています（本文170%／見出し150%／表・注記130%／字間 0〜2%）。書体を替えても行位置がずれません。</a:t>
             </a:r>
           </a:p>
           <a:p>
